--- a/scenarios/S07_investment_dashboard/deliverables/투자대시보드_기획_덱.pptx
+++ b/scenarios/S07_investment_dashboard/deliverables/투자대시보드_기획_덱.pptx
@@ -13,6 +13,8 @@
     <p:sldId id="261" r:id="rId12"/>
     <p:sldId id="262" r:id="rId13"/>
     <p:sldId id="263" r:id="rId14"/>
+    <p:sldId id="264" r:id="rId15"/>
+    <p:sldId id="265" r:id="rId16"/>
   </p:sldIdLst>
   <p:sldSz cx="9144000" cy="6858000" type="screen4x3"/>
   <p:notesSz cx="6858000" cy="9144000"/>
@@ -3145,6 +3147,98 @@
 </p:sld>
 </file>
 
+<file path=ppt/slides/slide10.xml><?xml version="1.0" encoding="utf-8"?>
+<p:sld xmlns:a="http://schemas.openxmlformats.org/drawingml/2006/main" xmlns:p="http://schemas.openxmlformats.org/presentationml/2006/main" xmlns:r="http://schemas.openxmlformats.org/officeDocument/2006/relationships">
+  <p:cSld>
+    <p:spTree>
+      <p:nvGrpSpPr>
+        <p:cNvPr id="1" name=""/>
+        <p:cNvGrpSpPr/>
+        <p:nvPr/>
+      </p:nvGrpSpPr>
+      <p:grpSpPr/>
+      <p:sp>
+        <p:nvSpPr>
+          <p:cNvPr id="2" name="Title 1"/>
+          <p:cNvSpPr>
+            <a:spLocks noGrp="1"/>
+          </p:cNvSpPr>
+          <p:nvPr>
+            <p:ph type="title"/>
+          </p:nvPr>
+        </p:nvSpPr>
+        <p:spPr/>
+        <p:txBody>
+          <a:bodyPr/>
+          <a:lstStyle/>
+          <a:p>
+            <a:r>
+              <a:t>변경 이력: 거시경제·종목 펀더멘털 패널</a:t>
+            </a:r>
+          </a:p>
+        </p:txBody>
+      </p:sp>
+      <p:sp>
+        <p:nvSpPr>
+          <p:cNvPr id="3" name="Content Placeholder 2"/>
+          <p:cNvSpPr>
+            <a:spLocks noGrp="1"/>
+          </p:cNvSpPr>
+          <p:nvPr>
+            <p:ph idx="1"/>
+          </p:nvPr>
+        </p:nvSpPr>
+        <p:spPr/>
+        <p:txBody>
+          <a:bodyPr/>
+          <a:lstStyle/>
+          <a:p>
+            <a:r>
+              <a:t>거시경제 현황과 개별 종목 펀더멘털 분석을 독립 패널로 정의</a:t>
+            </a:r>
+          </a:p>
+          <a:p>
+            <a:pPr>
+              <a:defRPr sz="1400"/>
+            </a:pPr>
+            <a:r>
+              <a:t>금리·물가·환율·주요 지수와 매출·이익·밸류에이션·재무건전성·실적·컨센서스 지표 배치</a:t>
+            </a:r>
+          </a:p>
+          <a:p>
+            <a:pPr>
+              <a:defRPr sz="1400"/>
+            </a:pPr>
+            <a:r>
+              <a:t>실시간·일중·일간·주간·월간·발표 시점 갱신 유형과 기준 시각·최종 갱신 시각·출처·지연 여부 표시</a:t>
+            </a:r>
+          </a:p>
+          <a:p>
+            <a:pPr>
+              <a:defRPr sz="1400"/>
+            </a:pPr>
+            <a:r>
+              <a:t>패널별 로딩 실패, 지연 데이터, 서로 다른 기준일 데이터 혼재 검증 시나리오 추가</a:t>
+            </a:r>
+          </a:p>
+          <a:p>
+            <a:pPr>
+              <a:defRPr sz="1400"/>
+            </a:pPr>
+            <a:r>
+              <a:t>지표 범위·갱신 기준·출처·라이선스·공통 데이터 모델은 후속 확정</a:t>
+            </a:r>
+          </a:p>
+        </p:txBody>
+      </p:sp>
+    </p:spTree>
+  </p:cSld>
+  <p:clrMapOvr>
+    <a:masterClrMapping/>
+  </p:clrMapOvr>
+</p:sld>
+</file>
+
 <file path=ppt/slides/slide2.xml><?xml version="1.0" encoding="utf-8"?>
 <p:sld xmlns:a="http://schemas.openxmlformats.org/drawingml/2006/main" xmlns:p="http://schemas.openxmlformats.org/presentationml/2006/main" xmlns:r="http://schemas.openxmlformats.org/officeDocument/2006/relationships">
   <p:cSld>
@@ -3638,6 +3732,90 @@
           <a:p>
             <a:r>
               <a:t>벤더 장애 대응 로직</a:t>
+            </a:r>
+          </a:p>
+        </p:txBody>
+      </p:sp>
+    </p:spTree>
+  </p:cSld>
+  <p:clrMapOvr>
+    <a:masterClrMapping/>
+  </p:clrMapOvr>
+</p:sld>
+</file>
+
+<file path=ppt/slides/slide9.xml><?xml version="1.0" encoding="utf-8"?>
+<p:sld xmlns:a="http://schemas.openxmlformats.org/drawingml/2006/main" xmlns:p="http://schemas.openxmlformats.org/presentationml/2006/main" xmlns:r="http://schemas.openxmlformats.org/officeDocument/2006/relationships">
+  <p:cSld>
+    <p:spTree>
+      <p:nvGrpSpPr>
+        <p:cNvPr id="1" name=""/>
+        <p:cNvGrpSpPr/>
+        <p:nvPr/>
+      </p:nvGrpSpPr>
+      <p:grpSpPr/>
+      <p:sp>
+        <p:nvSpPr>
+          <p:cNvPr id="2" name="Title 1"/>
+          <p:cNvSpPr>
+            <a:spLocks noGrp="1"/>
+          </p:cNvSpPr>
+          <p:nvPr>
+            <p:ph type="title"/>
+          </p:nvPr>
+        </p:nvSpPr>
+        <p:spPr/>
+        <p:txBody>
+          <a:bodyPr/>
+          <a:lstStyle/>
+          <a:p>
+            <a:r>
+              <a:t>변경 이력: 거시경제·펀더멘털 패널 요구사항</a:t>
+            </a:r>
+          </a:p>
+        </p:txBody>
+      </p:sp>
+      <p:sp>
+        <p:nvSpPr>
+          <p:cNvPr id="3" name="Content Placeholder 2"/>
+          <p:cNvSpPr>
+            <a:spLocks noGrp="1"/>
+          </p:cNvSpPr>
+          <p:nvPr>
+            <p:ph idx="1"/>
+          </p:nvPr>
+        </p:nvSpPr>
+        <p:spPr/>
+        <p:txBody>
+          <a:bodyPr/>
+          <a:lstStyle/>
+          <a:p>
+            <a:r>
+              <a:t>거시경제 현황과 개별 종목 펀더멘털 분석 패널을 독립 영역으로 정의</a:t>
+            </a:r>
+          </a:p>
+          <a:p>
+            <a:pPr>
+              <a:defRPr sz="1400"/>
+            </a:pPr>
+            <a:r>
+              <a:t>금리·물가·환율·주요 지수 및 재무·밸류에이션·실적·컨센서스 지표 요구사항 구체화</a:t>
+            </a:r>
+          </a:p>
+          <a:p>
+            <a:pPr>
+              <a:defRPr sz="1400"/>
+            </a:pPr>
+            <a:r>
+              <a:t>지표별 갱신 유형과 기준 시각·최종 갱신 시각·출처·지연 여부 표시 추가</a:t>
+            </a:r>
+          </a:p>
+          <a:p>
+            <a:pPr>
+              <a:defRPr sz="1400"/>
+            </a:pPr>
+            <a:r>
+              <a:t>패널별 로딩 실패·지연 데이터·기준일 혼재 검증 시나리오 추가</a:t>
             </a:r>
           </a:p>
         </p:txBody>

--- a/scenarios/S07_investment_dashboard/deliverables/투자대시보드_기획_덱.pptx
+++ b/scenarios/S07_investment_dashboard/deliverables/투자대시보드_기획_덱.pptx
@@ -15,6 +15,7 @@
     <p:sldId id="263" r:id="rId14"/>
     <p:sldId id="264" r:id="rId15"/>
     <p:sldId id="265" r:id="rId16"/>
+    <p:sldId id="266" r:id="rId17"/>
   </p:sldIdLst>
   <p:sldSz cx="9144000" cy="6858000" type="screen4x3"/>
   <p:notesSz cx="6858000" cy="9144000"/>
@@ -3227,6 +3228,98 @@
             </a:pPr>
             <a:r>
               <a:t>지표 범위·갱신 기준·출처·라이선스·공통 데이터 모델은 후속 확정</a:t>
+            </a:r>
+          </a:p>
+        </p:txBody>
+      </p:sp>
+    </p:spTree>
+  </p:cSld>
+  <p:clrMapOvr>
+    <a:masterClrMapping/>
+  </p:clrMapOvr>
+</p:sld>
+</file>
+
+<file path=ppt/slides/slide11.xml><?xml version="1.0" encoding="utf-8"?>
+<p:sld xmlns:a="http://schemas.openxmlformats.org/drawingml/2006/main" xmlns:p="http://schemas.openxmlformats.org/presentationml/2006/main" xmlns:r="http://schemas.openxmlformats.org/officeDocument/2006/relationships">
+  <p:cSld>
+    <p:spTree>
+      <p:nvGrpSpPr>
+        <p:cNvPr id="1" name=""/>
+        <p:cNvGrpSpPr/>
+        <p:nvPr/>
+      </p:nvGrpSpPr>
+      <p:grpSpPr/>
+      <p:sp>
+        <p:nvSpPr>
+          <p:cNvPr id="2" name="Title 1"/>
+          <p:cNvSpPr>
+            <a:spLocks noGrp="1"/>
+          </p:cNvSpPr>
+          <p:nvPr>
+            <p:ph type="title"/>
+          </p:nvPr>
+        </p:nvSpPr>
+        <p:spPr/>
+        <p:txBody>
+          <a:bodyPr/>
+          <a:lstStyle/>
+          <a:p>
+            <a:r>
+              <a:t>변경 이력: 거시경제·종목 펀더멘털 패널 및 갱신 정책</a:t>
+            </a:r>
+          </a:p>
+        </p:txBody>
+      </p:sp>
+      <p:sp>
+        <p:nvSpPr>
+          <p:cNvPr id="3" name="Content Placeholder 2"/>
+          <p:cNvSpPr>
+            <a:spLocks noGrp="1"/>
+          </p:cNvSpPr>
+          <p:nvPr>
+            <p:ph idx="1"/>
+          </p:nvPr>
+        </p:nvSpPr>
+        <p:spPr/>
+        <p:txBody>
+          <a:bodyPr/>
+          <a:lstStyle/>
+          <a:p>
+            <a:r>
+              <a:t>거시경제 현황 패널과 개별 종목 펀더멘털 분석 패널을 독립 영역으로 정의</a:t>
+            </a:r>
+          </a:p>
+          <a:p>
+            <a:pPr>
+              <a:defRPr sz="1400"/>
+            </a:pPr>
+            <a:r>
+              <a:t>금리·물가·환율·주요 지수와 PER·PBR·부채비율·잉여현금흐름 등 지표 요구사항 추가</a:t>
+            </a:r>
+          </a:p>
+          <a:p>
+            <a:pPr>
+              <a:defRPr sz="1400"/>
+            </a:pPr>
+            <a:r>
+              <a:t>실시간·일중·일간·주간·월간·발표 시점 갱신 유형 및 기준 시각·최종 갱신 시각·출처·지연 여부 표시</a:t>
+            </a:r>
+          </a:p>
+          <a:p>
+            <a:pPr>
+              <a:defRPr sz="1400"/>
+            </a:pPr>
+            <a:r>
+              <a:t>패널별 로딩 실패·지연 데이터·서로 다른 기준일 데이터 혼재 검증 시나리오 추가</a:t>
+            </a:r>
+          </a:p>
+          <a:p>
+            <a:pPr>
+              <a:defRPr sz="1400"/>
+            </a:pPr>
+            <a:r>
+              <a:t>지표 사전·출처·신선도 SLA·공통 데이터 모델·컴플라이언스는 후속 확정</a:t>
             </a:r>
           </a:p>
         </p:txBody>

--- a/scenarios/S07_investment_dashboard/deliverables/투자대시보드_기획_덱.pptx
+++ b/scenarios/S07_investment_dashboard/deliverables/투자대시보드_기획_덱.pptx
@@ -16,6 +16,7 @@
     <p:sldId id="264" r:id="rId15"/>
     <p:sldId id="265" r:id="rId16"/>
     <p:sldId id="266" r:id="rId17"/>
+    <p:sldId id="267" r:id="rId18"/>
   </p:sldIdLst>
   <p:sldSz cx="9144000" cy="6858000" type="screen4x3"/>
   <p:notesSz cx="6858000" cy="9144000"/>
@@ -3320,6 +3321,98 @@
             </a:pPr>
             <a:r>
               <a:t>지표 사전·출처·신선도 SLA·공통 데이터 모델·컴플라이언스는 후속 확정</a:t>
+            </a:r>
+          </a:p>
+        </p:txBody>
+      </p:sp>
+    </p:spTree>
+  </p:cSld>
+  <p:clrMapOvr>
+    <a:masterClrMapping/>
+  </p:clrMapOvr>
+</p:sld>
+</file>
+
+<file path=ppt/slides/slide12.xml><?xml version="1.0" encoding="utf-8"?>
+<p:sld xmlns:a="http://schemas.openxmlformats.org/drawingml/2006/main" xmlns:p="http://schemas.openxmlformats.org/presentationml/2006/main" xmlns:r="http://schemas.openxmlformats.org/officeDocument/2006/relationships">
+  <p:cSld>
+    <p:spTree>
+      <p:nvGrpSpPr>
+        <p:cNvPr id="1" name=""/>
+        <p:cNvGrpSpPr/>
+        <p:nvPr/>
+      </p:nvGrpSpPr>
+      <p:grpSpPr/>
+      <p:sp>
+        <p:nvSpPr>
+          <p:cNvPr id="2" name="Title 1"/>
+          <p:cNvSpPr>
+            <a:spLocks noGrp="1"/>
+          </p:cNvSpPr>
+          <p:nvPr>
+            <p:ph type="title"/>
+          </p:nvPr>
+        </p:nvSpPr>
+        <p:spPr/>
+        <p:txBody>
+          <a:bodyPr/>
+          <a:lstStyle/>
+          <a:p>
+            <a:r>
+              <a:t>변경 이력: 거시경제·종목 펀더멘털 패널 및 갱신 정책</a:t>
+            </a:r>
+          </a:p>
+        </p:txBody>
+      </p:sp>
+      <p:sp>
+        <p:nvSpPr>
+          <p:cNvPr id="3" name="Content Placeholder 2"/>
+          <p:cNvSpPr>
+            <a:spLocks noGrp="1"/>
+          </p:cNvSpPr>
+          <p:nvPr>
+            <p:ph idx="1"/>
+          </p:nvPr>
+        </p:nvSpPr>
+        <p:spPr/>
+        <p:txBody>
+          <a:bodyPr/>
+          <a:lstStyle/>
+          <a:p>
+            <a:r>
+              <a:t>거시경제 현황 패널과 개별 종목 펀더멘털 분석 패널을 독립 영역으로 구성</a:t>
+            </a:r>
+          </a:p>
+          <a:p>
+            <a:pPr>
+              <a:defRPr sz="1400"/>
+            </a:pPr>
+            <a:r>
+              <a:t>거시경제 지표와 PER·PBR·부채비율·잉여현금흐름 등 종목 지표 정의 및 확장 구조 반영</a:t>
+            </a:r>
+          </a:p>
+          <a:p>
+            <a:pPr>
+              <a:defRPr sz="1400"/>
+            </a:pPr>
+            <a:r>
+              <a:t>실시간·일중·일간·주간·월간·발표 시점 갱신 유형과 기준 시각·최종 갱신 시각·출처·지연 여부 표시</a:t>
+            </a:r>
+          </a:p>
+          <a:p>
+            <a:pPr>
+              <a:defRPr sz="1400"/>
+            </a:pPr>
+            <a:r>
+              <a:t>패널별 로딩 실패·지연 데이터·기준일 혼재 및 경고 처리 검증 시나리오 추가</a:t>
+            </a:r>
+          </a:p>
+          <a:p>
+            <a:pPr>
+              <a:defRPr sz="1400"/>
+            </a:pPr>
+            <a:r>
+              <a:t>대상 범위·산식·출처·라이선스·신선도 SLA·공통 데이터 모델은 후속 확정</a:t>
             </a:r>
           </a:p>
         </p:txBody>

--- a/scenarios/S07_investment_dashboard/deliverables/투자대시보드_기획_덱.pptx
+++ b/scenarios/S07_investment_dashboard/deliverables/투자대시보드_기획_덱.pptx
@@ -17,6 +17,7 @@
     <p:sldId id="265" r:id="rId16"/>
     <p:sldId id="266" r:id="rId17"/>
     <p:sldId id="267" r:id="rId18"/>
+    <p:sldId id="268" r:id="rId19"/>
   </p:sldIdLst>
   <p:sldSz cx="9144000" cy="6858000" type="screen4x3"/>
   <p:notesSz cx="6858000" cy="9144000"/>
@@ -3413,6 +3414,98 @@
             </a:pPr>
             <a:r>
               <a:t>대상 범위·산식·출처·라이선스·신선도 SLA·공통 데이터 모델은 후속 확정</a:t>
+            </a:r>
+          </a:p>
+        </p:txBody>
+      </p:sp>
+    </p:spTree>
+  </p:cSld>
+  <p:clrMapOvr>
+    <a:masterClrMapping/>
+  </p:clrMapOvr>
+</p:sld>
+</file>
+
+<file path=ppt/slides/slide13.xml><?xml version="1.0" encoding="utf-8"?>
+<p:sld xmlns:a="http://schemas.openxmlformats.org/drawingml/2006/main" xmlns:p="http://schemas.openxmlformats.org/presentationml/2006/main" xmlns:r="http://schemas.openxmlformats.org/officeDocument/2006/relationships">
+  <p:cSld>
+    <p:spTree>
+      <p:nvGrpSpPr>
+        <p:cNvPr id="1" name=""/>
+        <p:cNvGrpSpPr/>
+        <p:nvPr/>
+      </p:nvGrpSpPr>
+      <p:grpSpPr/>
+      <p:sp>
+        <p:nvSpPr>
+          <p:cNvPr id="2" name="Title 1"/>
+          <p:cNvSpPr>
+            <a:spLocks noGrp="1"/>
+          </p:cNvSpPr>
+          <p:nvPr>
+            <p:ph type="title"/>
+          </p:nvPr>
+        </p:nvSpPr>
+        <p:spPr/>
+        <p:txBody>
+          <a:bodyPr/>
+          <a:lstStyle/>
+          <a:p>
+            <a:r>
+              <a:t>변경 이력: 투자 대시보드 패널 분리 및 데이터 신선도</a:t>
+            </a:r>
+          </a:p>
+        </p:txBody>
+      </p:sp>
+      <p:sp>
+        <p:nvSpPr>
+          <p:cNvPr id="3" name="Content Placeholder 2"/>
+          <p:cNvSpPr>
+            <a:spLocks noGrp="1"/>
+          </p:cNvSpPr>
+          <p:nvPr>
+            <p:ph idx="1"/>
+          </p:nvPr>
+        </p:nvSpPr>
+        <p:spPr/>
+        <p:txBody>
+          <a:bodyPr/>
+          <a:lstStyle/>
+          <a:p>
+            <a:r>
+              <a:t>거시경제 현황 패널과 개별 종목 펀더멘털 분석 패널을 독립 구성</a:t>
+            </a:r>
+          </a:p>
+          <a:p>
+            <a:pPr>
+              <a:defRPr sz="1400"/>
+            </a:pPr>
+            <a:r>
+              <a:t>거시경제 지표로 금리·물가·환율·주요 지수를 배치하고 종목 기본 지표로 PER·PBR·부채비율·잉여현금흐름을 제공</a:t>
+            </a:r>
+          </a:p>
+          <a:p>
+            <a:pPr>
+              <a:defRPr sz="1400"/>
+            </a:pPr>
+            <a:r>
+              <a:t>실시간·일중·일간·주간·월간·발표 시점 갱신 유형과 기준 시각·최종 갱신 시각·출처·지연 여부 표시</a:t>
+            </a:r>
+          </a:p>
+          <a:p>
+            <a:pPr>
+              <a:defRPr sz="1400"/>
+            </a:pPr>
+            <a:r>
+              <a:t>패널별 로딩 실패·지연 데이터·기준일 혼재 및 사용자 경고 처리 검증 시나리오 추가</a:t>
+            </a:r>
+          </a:p>
+          <a:p>
+            <a:pPr>
+              <a:defRPr sz="1400"/>
+            </a:pPr>
+            <a:r>
+              <a:t>대상 범위·산식·데이터 권리·컴플라이언스·공통 데이터 모델·SLA는 후속 확정</a:t>
             </a:r>
           </a:p>
         </p:txBody>

--- a/scenarios/S07_investment_dashboard/deliverables/투자대시보드_기획_덱.pptx
+++ b/scenarios/S07_investment_dashboard/deliverables/투자대시보드_기획_덱.pptx
@@ -18,6 +18,7 @@
     <p:sldId id="266" r:id="rId17"/>
     <p:sldId id="267" r:id="rId18"/>
     <p:sldId id="268" r:id="rId19"/>
+    <p:sldId id="269" r:id="rId20"/>
   </p:sldIdLst>
   <p:sldSz cx="9144000" cy="6858000" type="screen4x3"/>
   <p:notesSz cx="6858000" cy="9144000"/>
@@ -3506,6 +3507,98 @@
             </a:pPr>
             <a:r>
               <a:t>대상 범위·산식·데이터 권리·컴플라이언스·공통 데이터 모델·SLA는 후속 확정</a:t>
+            </a:r>
+          </a:p>
+        </p:txBody>
+      </p:sp>
+    </p:spTree>
+  </p:cSld>
+  <p:clrMapOvr>
+    <a:masterClrMapping/>
+  </p:clrMapOvr>
+</p:sld>
+</file>
+
+<file path=ppt/slides/slide14.xml><?xml version="1.0" encoding="utf-8"?>
+<p:sld xmlns:a="http://schemas.openxmlformats.org/drawingml/2006/main" xmlns:p="http://schemas.openxmlformats.org/presentationml/2006/main" xmlns:r="http://schemas.openxmlformats.org/officeDocument/2006/relationships">
+  <p:cSld>
+    <p:spTree>
+      <p:nvGrpSpPr>
+        <p:cNvPr id="1" name=""/>
+        <p:cNvGrpSpPr/>
+        <p:nvPr/>
+      </p:nvGrpSpPr>
+      <p:grpSpPr/>
+      <p:sp>
+        <p:nvSpPr>
+          <p:cNvPr id="2" name="Title 1"/>
+          <p:cNvSpPr>
+            <a:spLocks noGrp="1"/>
+          </p:cNvSpPr>
+          <p:nvPr>
+            <p:ph type="title"/>
+          </p:nvPr>
+        </p:nvSpPr>
+        <p:spPr/>
+        <p:txBody>
+          <a:bodyPr/>
+          <a:lstStyle/>
+          <a:p>
+            <a:r>
+              <a:t>변경 이력: 투자 대시보드 승인 변경 실행</a:t>
+            </a:r>
+          </a:p>
+        </p:txBody>
+      </p:sp>
+      <p:sp>
+        <p:nvSpPr>
+          <p:cNvPr id="3" name="Content Placeholder 2"/>
+          <p:cNvSpPr>
+            <a:spLocks noGrp="1"/>
+          </p:cNvSpPr>
+          <p:nvPr>
+            <p:ph idx="1"/>
+          </p:nvPr>
+        </p:nvSpPr>
+        <p:spPr/>
+        <p:txBody>
+          <a:bodyPr/>
+          <a:lstStyle/>
+          <a:p>
+            <a:r>
+              <a:t>거시경제 현황 패널과 개별 종목 펀더멘털 분석 패널을 독립 구성</a:t>
+            </a:r>
+          </a:p>
+          <a:p>
+            <a:pPr>
+              <a:defRPr sz="1400"/>
+            </a:pPr>
+            <a:r>
+              <a:t>거시 지표와 PER·PBR·부채비율·잉여현금흐름 기본 지표 및 확장 구조 반영</a:t>
+            </a:r>
+          </a:p>
+          <a:p>
+            <a:pPr>
+              <a:defRPr sz="1400"/>
+            </a:pPr>
+            <a:r>
+              <a:t>실시간·일중·일간·주간·월간·발표 시점 갱신 유형과 기준 시각·최종 갱신 시각·출처·지연 여부 표시</a:t>
+            </a:r>
+          </a:p>
+          <a:p>
+            <a:pPr>
+              <a:defRPr sz="1400"/>
+            </a:pPr>
+            <a:r>
+              <a:t>패널별 로딩 실패·지연 데이터·기준일 혼재·사용자 경고 처리 검증 추가</a:t>
+            </a:r>
+          </a:p>
+          <a:p>
+            <a:pPr>
+              <a:defRPr sz="1400"/>
+            </a:pPr>
+            <a:r>
+              <a:t>대상 범위·산식·데이터 계약·라이선스·SLA·컴플라이언스는 후속 승인 게이트에서 확정</a:t>
             </a:r>
           </a:p>
         </p:txBody>
